--- a/Submission Template _ AI Builder Cup _ Team RetailOps AI.pptx
+++ b/Submission Template _ AI Builder Cup _ Team RetailOps AI.pptx
@@ -8559,7 +8559,7 @@
                 </a:solidFill>
                 <a:latin typeface="Consolas" panose="020B0609020204030204" pitchFamily="49" charset="0"/>
               </a:rPr>
-              <a:t>    Repository URL: https://github.com/retailops-ai/project-bloc</a:t>
+              <a:t>    Repository URL: https://github.com/juanlohika-dev/bloc-retailops-ai</a:t>
             </a:r>
           </a:p>
           <a:p>
